--- a/msa-ppt/5. MSA환경에서 트랜잭션 관리.pptx
+++ b/msa-ppt/5. MSA환경에서 트랜잭션 관리.pptx
@@ -16,6 +16,10 @@
     <p:sldId id="264" r:id="rId10"/>
     <p:sldId id="265" r:id="rId11"/>
     <p:sldId id="266" r:id="rId12"/>
+    <p:sldId id="268" r:id="rId13"/>
+    <p:sldId id="269" r:id="rId14"/>
+    <p:sldId id="270" r:id="rId15"/>
+    <p:sldId id="271" r:id="rId16"/>
   </p:sldIdLst>
   <p:sldSz cx="12192000" cy="6858000"/>
   <p:notesSz cx="6858000" cy="9144000"/>
@@ -138,6 +142,14 @@
             <p14:sldId id="264"/>
             <p14:sldId id="265"/>
             <p14:sldId id="266"/>
+          </p14:sldIdLst>
+        </p14:section>
+        <p14:section name="최종적 일관성" id="{FAA4A058-41E4-4076-B9B3-5F1CDBE5B1F1}">
+          <p14:sldIdLst>
+            <p14:sldId id="268"/>
+            <p14:sldId id="269"/>
+            <p14:sldId id="270"/>
+            <p14:sldId id="271"/>
           </p14:sldIdLst>
         </p14:section>
       </p14:sectionLst>
@@ -4510,6 +4522,1315 @@
 </p:sld>
 </file>
 
+<file path=ppt/slides/slide12.xml><?xml version="1.0" encoding="utf-8"?>
+<p:sld xmlns:a="http://schemas.openxmlformats.org/drawingml/2006/main" xmlns:r="http://schemas.openxmlformats.org/officeDocument/2006/relationships" xmlns:p="http://schemas.openxmlformats.org/presentationml/2006/main">
+  <p:cSld>
+    <p:spTree>
+      <p:nvGrpSpPr>
+        <p:cNvPr id="1" name=""/>
+        <p:cNvGrpSpPr/>
+        <p:nvPr/>
+      </p:nvGrpSpPr>
+      <p:grpSpPr>
+        <a:xfrm>
+          <a:off x="0" y="0"/>
+          <a:ext cx="0" cy="0"/>
+          <a:chOff x="0" y="0"/>
+          <a:chExt cx="0" cy="0"/>
+        </a:xfrm>
+      </p:grpSpPr>
+      <p:sp>
+        <p:nvSpPr>
+          <p:cNvPr id="2" name="제목 1">
+            <a:extLst>
+              <a:ext uri="{FF2B5EF4-FFF2-40B4-BE49-F238E27FC236}">
+                <a16:creationId xmlns:a16="http://schemas.microsoft.com/office/drawing/2014/main" id="{50EAEE0C-5376-3794-C2C9-C67DFEC79064}"/>
+              </a:ext>
+            </a:extLst>
+          </p:cNvPr>
+          <p:cNvSpPr>
+            <a:spLocks noGrp="1"/>
+          </p:cNvSpPr>
+          <p:nvPr>
+            <p:ph type="title"/>
+          </p:nvPr>
+        </p:nvSpPr>
+        <p:spPr/>
+        <p:txBody>
+          <a:bodyPr>
+            <a:normAutofit/>
+          </a:bodyPr>
+          <a:lstStyle/>
+          <a:p>
+            <a:r>
+              <a:rPr lang="ko-KR" altLang="en-US" sz="3600"/>
+              <a:t>최종적 일관성을 알아보기 위한 </a:t>
+            </a:r>
+            <a:r>
+              <a:rPr lang="en-US" altLang="ko-KR" sz="3600"/>
+              <a:t>user-service</a:t>
+            </a:r>
+            <a:br>
+              <a:rPr lang="en-US" altLang="ko-KR" sz="3600"/>
+            </a:br>
+            <a:r>
+              <a:rPr lang="ko-KR" altLang="en-US" sz="3600"/>
+              <a:t>활동 점수 적립 코드 수정</a:t>
+            </a:r>
+          </a:p>
+        </p:txBody>
+      </p:sp>
+      <p:grpSp>
+        <p:nvGrpSpPr>
+          <p:cNvPr id="6" name="그룹 5">
+            <a:extLst>
+              <a:ext uri="{FF2B5EF4-FFF2-40B4-BE49-F238E27FC236}">
+                <a16:creationId xmlns:a16="http://schemas.microsoft.com/office/drawing/2014/main" id="{994F6180-C75E-B508-0A3E-9C4A7F43A5AB}"/>
+              </a:ext>
+            </a:extLst>
+          </p:cNvPr>
+          <p:cNvGrpSpPr/>
+          <p:nvPr/>
+        </p:nvGrpSpPr>
+        <p:grpSpPr>
+          <a:xfrm>
+            <a:off x="1097280" y="1929321"/>
+            <a:ext cx="7020905" cy="3191320"/>
+            <a:chOff x="308691" y="1929321"/>
+            <a:chExt cx="7020905" cy="3191320"/>
+          </a:xfrm>
+        </p:grpSpPr>
+        <p:pic>
+          <p:nvPicPr>
+            <p:cNvPr id="4" name="그림 3">
+              <a:extLst>
+                <a:ext uri="{FF2B5EF4-FFF2-40B4-BE49-F238E27FC236}">
+                  <a16:creationId xmlns:a16="http://schemas.microsoft.com/office/drawing/2014/main" id="{006A9F72-7D54-AFF8-8D87-011B03984818}"/>
+                </a:ext>
+              </a:extLst>
+            </p:cNvPr>
+            <p:cNvPicPr>
+              <a:picLocks noChangeAspect="1"/>
+            </p:cNvPicPr>
+            <p:nvPr/>
+          </p:nvPicPr>
+          <p:blipFill>
+            <a:blip r:embed="rId2"/>
+            <a:stretch>
+              <a:fillRect/>
+            </a:stretch>
+          </p:blipFill>
+          <p:spPr>
+            <a:xfrm>
+              <a:off x="308691" y="1929321"/>
+              <a:ext cx="7020905" cy="3191320"/>
+            </a:xfrm>
+            <a:prstGeom prst="rect">
+              <a:avLst/>
+            </a:prstGeom>
+          </p:spPr>
+        </p:pic>
+        <p:sp>
+          <p:nvSpPr>
+            <p:cNvPr id="5" name="직사각형 4">
+              <a:extLst>
+                <a:ext uri="{FF2B5EF4-FFF2-40B4-BE49-F238E27FC236}">
+                  <a16:creationId xmlns:a16="http://schemas.microsoft.com/office/drawing/2014/main" id="{014C44BE-64F5-97F0-EEF9-94054CDEA341}"/>
+                </a:ext>
+              </a:extLst>
+            </p:cNvPr>
+            <p:cNvSpPr/>
+            <p:nvPr/>
+          </p:nvSpPr>
+          <p:spPr>
+            <a:xfrm>
+              <a:off x="1380744" y="3931920"/>
+              <a:ext cx="2651760" cy="1033272"/>
+            </a:xfrm>
+            <a:prstGeom prst="rect">
+              <a:avLst/>
+            </a:prstGeom>
+            <a:noFill/>
+            <a:ln>
+              <a:solidFill>
+                <a:srgbClr val="FF0000"/>
+              </a:solidFill>
+            </a:ln>
+          </p:spPr>
+          <p:style>
+            <a:lnRef idx="2">
+              <a:schemeClr val="accent1">
+                <a:shade val="15000"/>
+              </a:schemeClr>
+            </a:lnRef>
+            <a:fillRef idx="1">
+              <a:schemeClr val="accent1"/>
+            </a:fillRef>
+            <a:effectRef idx="0">
+              <a:schemeClr val="accent1"/>
+            </a:effectRef>
+            <a:fontRef idx="minor">
+              <a:schemeClr val="lt1"/>
+            </a:fontRef>
+          </p:style>
+          <p:txBody>
+            <a:bodyPr rtlCol="0" anchor="ctr"/>
+            <a:lstStyle/>
+            <a:p>
+              <a:pPr algn="ctr"/>
+              <a:endParaRPr lang="ko-KR" altLang="en-US"/>
+            </a:p>
+          </p:txBody>
+        </p:sp>
+      </p:grpSp>
+      <p:sp>
+        <p:nvSpPr>
+          <p:cNvPr id="7" name="TextBox 6">
+            <a:extLst>
+              <a:ext uri="{FF2B5EF4-FFF2-40B4-BE49-F238E27FC236}">
+                <a16:creationId xmlns:a16="http://schemas.microsoft.com/office/drawing/2014/main" id="{C3578B28-5118-D894-48B2-174F182EE592}"/>
+              </a:ext>
+            </a:extLst>
+          </p:cNvPr>
+          <p:cNvSpPr txBox="1"/>
+          <p:nvPr/>
+        </p:nvSpPr>
+        <p:spPr>
+          <a:xfrm>
+            <a:off x="1024128" y="5266944"/>
+            <a:ext cx="10360152" cy="369332"/>
+          </a:xfrm>
+          <a:prstGeom prst="rect">
+            <a:avLst/>
+          </a:prstGeom>
+          <a:noFill/>
+        </p:spPr>
+        <p:txBody>
+          <a:bodyPr wrap="square" rtlCol="0">
+            <a:spAutoFit/>
+          </a:bodyPr>
+          <a:lstStyle/>
+          <a:p>
+            <a:r>
+              <a:rPr lang="en-US" altLang="ko-KR"/>
+              <a:t>UserService</a:t>
+            </a:r>
+            <a:r>
+              <a:rPr lang="ko-KR" altLang="en-US"/>
+              <a:t>에 트래픽이 몰렸다고 가정하자</a:t>
+            </a:r>
+            <a:r>
+              <a:rPr lang="en-US" altLang="ko-KR"/>
+              <a:t>. </a:t>
+            </a:r>
+            <a:r>
+              <a:rPr lang="ko-KR" altLang="en-US"/>
+              <a:t>이를 가정한 </a:t>
+            </a:r>
+            <a:r>
+              <a:rPr lang="en-US" altLang="ko-KR"/>
+              <a:t>Thread.sleep(10000) </a:t>
+            </a:r>
+            <a:r>
+              <a:rPr lang="ko-KR" altLang="en-US"/>
+              <a:t>코드를 추가한다</a:t>
+            </a:r>
+            <a:r>
+              <a:rPr lang="en-US" altLang="ko-KR"/>
+              <a:t>.</a:t>
+            </a:r>
+            <a:endParaRPr lang="ko-KR" altLang="en-US"/>
+          </a:p>
+        </p:txBody>
+      </p:sp>
+    </p:spTree>
+    <p:extLst>
+      <p:ext uri="{BB962C8B-B14F-4D97-AF65-F5344CB8AC3E}">
+        <p14:creationId xmlns:p14="http://schemas.microsoft.com/office/powerpoint/2010/main" val="503199394"/>
+      </p:ext>
+    </p:extLst>
+  </p:cSld>
+  <p:clrMapOvr>
+    <a:masterClrMapping/>
+  </p:clrMapOvr>
+</p:sld>
+</file>
+
+<file path=ppt/slides/slide13.xml><?xml version="1.0" encoding="utf-8"?>
+<p:sld xmlns:a="http://schemas.openxmlformats.org/drawingml/2006/main" xmlns:r="http://schemas.openxmlformats.org/officeDocument/2006/relationships" xmlns:p="http://schemas.openxmlformats.org/presentationml/2006/main">
+  <p:cSld>
+    <p:spTree>
+      <p:nvGrpSpPr>
+        <p:cNvPr id="1" name=""/>
+        <p:cNvGrpSpPr/>
+        <p:nvPr/>
+      </p:nvGrpSpPr>
+      <p:grpSpPr>
+        <a:xfrm>
+          <a:off x="0" y="0"/>
+          <a:ext cx="0" cy="0"/>
+          <a:chOff x="0" y="0"/>
+          <a:chExt cx="0" cy="0"/>
+        </a:xfrm>
+      </p:grpSpPr>
+      <p:sp>
+        <p:nvSpPr>
+          <p:cNvPr id="2" name="제목 1">
+            <a:extLst>
+              <a:ext uri="{FF2B5EF4-FFF2-40B4-BE49-F238E27FC236}">
+                <a16:creationId xmlns:a16="http://schemas.microsoft.com/office/drawing/2014/main" id="{7F1BB220-A2CA-2901-3D03-7AC1727625BB}"/>
+              </a:ext>
+            </a:extLst>
+          </p:cNvPr>
+          <p:cNvSpPr>
+            <a:spLocks noGrp="1"/>
+          </p:cNvSpPr>
+          <p:nvPr>
+            <p:ph type="title"/>
+          </p:nvPr>
+        </p:nvSpPr>
+        <p:spPr/>
+        <p:txBody>
+          <a:bodyPr/>
+          <a:lstStyle/>
+          <a:p>
+            <a:r>
+              <a:rPr lang="en-US" altLang="ko-KR"/>
+              <a:t>DB </a:t>
+            </a:r>
+            <a:r>
+              <a:rPr lang="ko-KR" altLang="en-US"/>
+              <a:t>상태 초기화</a:t>
+            </a:r>
+          </a:p>
+        </p:txBody>
+      </p:sp>
+      <p:sp>
+        <p:nvSpPr>
+          <p:cNvPr id="3" name="TextBox 2">
+            <a:extLst>
+              <a:ext uri="{FF2B5EF4-FFF2-40B4-BE49-F238E27FC236}">
+                <a16:creationId xmlns:a16="http://schemas.microsoft.com/office/drawing/2014/main" id="{6DB6EA01-6E61-F564-5838-A73464096CD7}"/>
+              </a:ext>
+            </a:extLst>
+          </p:cNvPr>
+          <p:cNvSpPr txBox="1"/>
+          <p:nvPr/>
+        </p:nvSpPr>
+        <p:spPr>
+          <a:xfrm>
+            <a:off x="1188720" y="1911096"/>
+            <a:ext cx="9966960" cy="369332"/>
+          </a:xfrm>
+          <a:prstGeom prst="rect">
+            <a:avLst/>
+          </a:prstGeom>
+          <a:noFill/>
+        </p:spPr>
+        <p:txBody>
+          <a:bodyPr wrap="square" rtlCol="0">
+            <a:spAutoFit/>
+          </a:bodyPr>
+          <a:lstStyle/>
+          <a:p>
+            <a:r>
+              <a:rPr lang="ko-KR" altLang="en-US"/>
+              <a:t>쉬운 비교를 위해 </a:t>
+            </a:r>
+            <a:r>
+              <a:rPr lang="en-US" altLang="ko-KR"/>
+              <a:t>DB</a:t>
+            </a:r>
+            <a:r>
+              <a:rPr lang="ko-KR" altLang="en-US"/>
+              <a:t>를 하기와 같이 셋팅한다</a:t>
+            </a:r>
+            <a:r>
+              <a:rPr lang="en-US" altLang="ko-KR"/>
+              <a:t>.</a:t>
+            </a:r>
+            <a:endParaRPr lang="ko-KR" altLang="en-US"/>
+          </a:p>
+        </p:txBody>
+      </p:sp>
+      <p:grpSp>
+        <p:nvGrpSpPr>
+          <p:cNvPr id="11" name="그룹 10">
+            <a:extLst>
+              <a:ext uri="{FF2B5EF4-FFF2-40B4-BE49-F238E27FC236}">
+                <a16:creationId xmlns:a16="http://schemas.microsoft.com/office/drawing/2014/main" id="{B20C8EC9-8DEB-5059-4127-F80F16B427DC}"/>
+              </a:ext>
+            </a:extLst>
+          </p:cNvPr>
+          <p:cNvGrpSpPr/>
+          <p:nvPr/>
+        </p:nvGrpSpPr>
+        <p:grpSpPr>
+          <a:xfrm>
+            <a:off x="1256613" y="2280428"/>
+            <a:ext cx="9130147" cy="1941176"/>
+            <a:chOff x="762837" y="2373192"/>
+            <a:chExt cx="9130147" cy="1941176"/>
+          </a:xfrm>
+        </p:grpSpPr>
+        <p:grpSp>
+          <p:nvGrpSpPr>
+            <p:cNvPr id="12" name="그룹 11">
+              <a:extLst>
+                <a:ext uri="{FF2B5EF4-FFF2-40B4-BE49-F238E27FC236}">
+                  <a16:creationId xmlns:a16="http://schemas.microsoft.com/office/drawing/2014/main" id="{63C7C343-2440-FAE8-B2D2-44569E5B4CCA}"/>
+                </a:ext>
+              </a:extLst>
+            </p:cNvPr>
+            <p:cNvGrpSpPr/>
+            <p:nvPr/>
+          </p:nvGrpSpPr>
+          <p:grpSpPr>
+            <a:xfrm>
+              <a:off x="7826609" y="2373192"/>
+              <a:ext cx="2066375" cy="1622060"/>
+              <a:chOff x="7479961" y="2505456"/>
+              <a:chExt cx="2066375" cy="1622060"/>
+            </a:xfrm>
+          </p:grpSpPr>
+          <p:pic>
+            <p:nvPicPr>
+              <p:cNvPr id="20" name="그림 19">
+                <a:extLst>
+                  <a:ext uri="{FF2B5EF4-FFF2-40B4-BE49-F238E27FC236}">
+                    <a16:creationId xmlns:a16="http://schemas.microsoft.com/office/drawing/2014/main" id="{4FF37815-45A0-8E86-01CE-72A67A6A0C71}"/>
+                  </a:ext>
+                </a:extLst>
+              </p:cNvPr>
+              <p:cNvPicPr>
+                <a:picLocks noChangeAspect="1"/>
+              </p:cNvPicPr>
+              <p:nvPr/>
+            </p:nvPicPr>
+            <p:blipFill>
+              <a:blip r:embed="rId2"/>
+              <a:srcRect t="52919" r="37826"/>
+              <a:stretch>
+                <a:fillRect/>
+              </a:stretch>
+            </p:blipFill>
+            <p:spPr>
+              <a:xfrm>
+                <a:off x="7479961" y="2505456"/>
+                <a:ext cx="1883495" cy="1327600"/>
+              </a:xfrm>
+              <a:prstGeom prst="rect">
+                <a:avLst/>
+              </a:prstGeom>
+            </p:spPr>
+          </p:pic>
+          <p:sp>
+            <p:nvSpPr>
+              <p:cNvPr id="21" name="TextBox 20">
+                <a:extLst>
+                  <a:ext uri="{FF2B5EF4-FFF2-40B4-BE49-F238E27FC236}">
+                    <a16:creationId xmlns:a16="http://schemas.microsoft.com/office/drawing/2014/main" id="{5CB74BA9-EA8D-FD27-DA0A-08C059B5D903}"/>
+                  </a:ext>
+                </a:extLst>
+              </p:cNvPr>
+              <p:cNvSpPr txBox="1"/>
+              <p:nvPr/>
+            </p:nvSpPr>
+            <p:spPr>
+              <a:xfrm>
+                <a:off x="7479961" y="3758184"/>
+                <a:ext cx="2066375" cy="369332"/>
+              </a:xfrm>
+              <a:prstGeom prst="rect">
+                <a:avLst/>
+              </a:prstGeom>
+              <a:noFill/>
+            </p:spPr>
+            <p:txBody>
+              <a:bodyPr wrap="square" rtlCol="0">
+                <a:spAutoFit/>
+              </a:bodyPr>
+              <a:lstStyle/>
+              <a:p>
+                <a:r>
+                  <a:rPr lang="en-US" altLang="ko-KR"/>
+                  <a:t>point</a:t>
+                </a:r>
+                <a:endParaRPr lang="ko-KR" altLang="en-US"/>
+              </a:p>
+            </p:txBody>
+          </p:sp>
+        </p:grpSp>
+        <p:grpSp>
+          <p:nvGrpSpPr>
+            <p:cNvPr id="13" name="그룹 12">
+              <a:extLst>
+                <a:ext uri="{FF2B5EF4-FFF2-40B4-BE49-F238E27FC236}">
+                  <a16:creationId xmlns:a16="http://schemas.microsoft.com/office/drawing/2014/main" id="{A182BDAC-4684-989B-5314-8FA69575C5A0}"/>
+                </a:ext>
+              </a:extLst>
+            </p:cNvPr>
+            <p:cNvGrpSpPr/>
+            <p:nvPr/>
+          </p:nvGrpSpPr>
+          <p:grpSpPr>
+            <a:xfrm>
+              <a:off x="762837" y="2373192"/>
+              <a:ext cx="6494445" cy="1941176"/>
+              <a:chOff x="762837" y="2373192"/>
+              <a:chExt cx="6494445" cy="1941176"/>
+            </a:xfrm>
+          </p:grpSpPr>
+          <p:grpSp>
+            <p:nvGrpSpPr>
+              <p:cNvPr id="14" name="그룹 13">
+                <a:extLst>
+                  <a:ext uri="{FF2B5EF4-FFF2-40B4-BE49-F238E27FC236}">
+                    <a16:creationId xmlns:a16="http://schemas.microsoft.com/office/drawing/2014/main" id="{0E5AFC78-F8B4-9E50-045B-8CC517212B2D}"/>
+                  </a:ext>
+                </a:extLst>
+              </p:cNvPr>
+              <p:cNvGrpSpPr/>
+              <p:nvPr/>
+            </p:nvGrpSpPr>
+            <p:grpSpPr>
+              <a:xfrm>
+                <a:off x="4913805" y="2425346"/>
+                <a:ext cx="2343477" cy="1261626"/>
+                <a:chOff x="4476205" y="2611646"/>
+                <a:chExt cx="2343477" cy="1261626"/>
+              </a:xfrm>
+            </p:grpSpPr>
+            <p:pic>
+              <p:nvPicPr>
+                <p:cNvPr id="18" name="그림 17">
+                  <a:extLst>
+                    <a:ext uri="{FF2B5EF4-FFF2-40B4-BE49-F238E27FC236}">
+                      <a16:creationId xmlns:a16="http://schemas.microsoft.com/office/drawing/2014/main" id="{7DACBF74-112E-DACD-F488-DFDD8D3E5543}"/>
+                    </a:ext>
+                  </a:extLst>
+                </p:cNvPr>
+                <p:cNvPicPr>
+                  <a:picLocks noChangeAspect="1"/>
+                </p:cNvPicPr>
+                <p:nvPr/>
+              </p:nvPicPr>
+              <p:blipFill>
+                <a:blip r:embed="rId3"/>
+                <a:stretch>
+                  <a:fillRect/>
+                </a:stretch>
+              </p:blipFill>
+              <p:spPr>
+                <a:xfrm>
+                  <a:off x="4476205" y="2611646"/>
+                  <a:ext cx="2343477" cy="771633"/>
+                </a:xfrm>
+                <a:prstGeom prst="rect">
+                  <a:avLst/>
+                </a:prstGeom>
+              </p:spPr>
+            </p:pic>
+            <p:sp>
+              <p:nvSpPr>
+                <p:cNvPr id="19" name="TextBox 18">
+                  <a:extLst>
+                    <a:ext uri="{FF2B5EF4-FFF2-40B4-BE49-F238E27FC236}">
+                      <a16:creationId xmlns:a16="http://schemas.microsoft.com/office/drawing/2014/main" id="{82F6D0AF-B40E-C559-0757-D3920EF44542}"/>
+                    </a:ext>
+                  </a:extLst>
+                </p:cNvPr>
+                <p:cNvSpPr txBox="1"/>
+                <p:nvPr/>
+              </p:nvSpPr>
+              <p:spPr>
+                <a:xfrm>
+                  <a:off x="4476205" y="3503940"/>
+                  <a:ext cx="2066375" cy="369332"/>
+                </a:xfrm>
+                <a:prstGeom prst="rect">
+                  <a:avLst/>
+                </a:prstGeom>
+                <a:noFill/>
+              </p:spPr>
+              <p:txBody>
+                <a:bodyPr wrap="square" rtlCol="0">
+                  <a:spAutoFit/>
+                </a:bodyPr>
+                <a:lstStyle/>
+                <a:p>
+                  <a:r>
+                    <a:rPr lang="en-US" altLang="ko-KR"/>
+                    <a:t>board</a:t>
+                  </a:r>
+                  <a:endParaRPr lang="ko-KR" altLang="en-US"/>
+                </a:p>
+              </p:txBody>
+            </p:sp>
+          </p:grpSp>
+          <p:grpSp>
+            <p:nvGrpSpPr>
+              <p:cNvPr id="15" name="그룹 14">
+                <a:extLst>
+                  <a:ext uri="{FF2B5EF4-FFF2-40B4-BE49-F238E27FC236}">
+                    <a16:creationId xmlns:a16="http://schemas.microsoft.com/office/drawing/2014/main" id="{D16642D6-2CE5-6AF6-CF63-17C34953238D}"/>
+                  </a:ext>
+                </a:extLst>
+              </p:cNvPr>
+              <p:cNvGrpSpPr/>
+              <p:nvPr/>
+            </p:nvGrpSpPr>
+            <p:grpSpPr>
+              <a:xfrm>
+                <a:off x="762837" y="2373192"/>
+                <a:ext cx="3991532" cy="1941176"/>
+                <a:chOff x="353608" y="2530028"/>
+                <a:chExt cx="3991532" cy="1941176"/>
+              </a:xfrm>
+            </p:grpSpPr>
+            <p:pic>
+              <p:nvPicPr>
+                <p:cNvPr id="16" name="그림 15">
+                  <a:extLst>
+                    <a:ext uri="{FF2B5EF4-FFF2-40B4-BE49-F238E27FC236}">
+                      <a16:creationId xmlns:a16="http://schemas.microsoft.com/office/drawing/2014/main" id="{9495CC94-2E88-0C59-282E-080EA55336FA}"/>
+                    </a:ext>
+                  </a:extLst>
+                </p:cNvPr>
+                <p:cNvPicPr>
+                  <a:picLocks noChangeAspect="1"/>
+                </p:cNvPicPr>
+                <p:nvPr/>
+              </p:nvPicPr>
+              <p:blipFill>
+                <a:blip r:embed="rId4"/>
+                <a:stretch>
+                  <a:fillRect/>
+                </a:stretch>
+              </p:blipFill>
+              <p:spPr>
+                <a:xfrm>
+                  <a:off x="353608" y="2530028"/>
+                  <a:ext cx="3991532" cy="1571844"/>
+                </a:xfrm>
+                <a:prstGeom prst="rect">
+                  <a:avLst/>
+                </a:prstGeom>
+              </p:spPr>
+            </p:pic>
+            <p:sp>
+              <p:nvSpPr>
+                <p:cNvPr id="17" name="TextBox 16">
+                  <a:extLst>
+                    <a:ext uri="{FF2B5EF4-FFF2-40B4-BE49-F238E27FC236}">
+                      <a16:creationId xmlns:a16="http://schemas.microsoft.com/office/drawing/2014/main" id="{85076433-6706-3257-36E8-2460E7D0C7CA}"/>
+                    </a:ext>
+                  </a:extLst>
+                </p:cNvPr>
+                <p:cNvSpPr txBox="1"/>
+                <p:nvPr/>
+              </p:nvSpPr>
+              <p:spPr>
+                <a:xfrm>
+                  <a:off x="353608" y="4101872"/>
+                  <a:ext cx="2066375" cy="369332"/>
+                </a:xfrm>
+                <a:prstGeom prst="rect">
+                  <a:avLst/>
+                </a:prstGeom>
+                <a:noFill/>
+              </p:spPr>
+              <p:txBody>
+                <a:bodyPr wrap="square" rtlCol="0">
+                  <a:spAutoFit/>
+                </a:bodyPr>
+                <a:lstStyle/>
+                <a:p>
+                  <a:r>
+                    <a:rPr lang="en-US" altLang="ko-KR"/>
+                    <a:t>users</a:t>
+                  </a:r>
+                  <a:endParaRPr lang="ko-KR" altLang="en-US"/>
+                </a:p>
+              </p:txBody>
+            </p:sp>
+          </p:grpSp>
+        </p:grpSp>
+      </p:grpSp>
+    </p:spTree>
+    <p:extLst>
+      <p:ext uri="{BB962C8B-B14F-4D97-AF65-F5344CB8AC3E}">
+        <p14:creationId xmlns:p14="http://schemas.microsoft.com/office/powerpoint/2010/main" val="3520515734"/>
+      </p:ext>
+    </p:extLst>
+  </p:cSld>
+  <p:clrMapOvr>
+    <a:masterClrMapping/>
+  </p:clrMapOvr>
+</p:sld>
+</file>
+
+<file path=ppt/slides/slide14.xml><?xml version="1.0" encoding="utf-8"?>
+<p:sld xmlns:a="http://schemas.openxmlformats.org/drawingml/2006/main" xmlns:r="http://schemas.openxmlformats.org/officeDocument/2006/relationships" xmlns:p="http://schemas.openxmlformats.org/presentationml/2006/main">
+  <p:cSld>
+    <p:spTree>
+      <p:nvGrpSpPr>
+        <p:cNvPr id="1" name=""/>
+        <p:cNvGrpSpPr/>
+        <p:nvPr/>
+      </p:nvGrpSpPr>
+      <p:grpSpPr>
+        <a:xfrm>
+          <a:off x="0" y="0"/>
+          <a:ext cx="0" cy="0"/>
+          <a:chOff x="0" y="0"/>
+          <a:chExt cx="0" cy="0"/>
+        </a:xfrm>
+      </p:grpSpPr>
+      <p:sp>
+        <p:nvSpPr>
+          <p:cNvPr id="2" name="제목 1">
+            <a:extLst>
+              <a:ext uri="{FF2B5EF4-FFF2-40B4-BE49-F238E27FC236}">
+                <a16:creationId xmlns:a16="http://schemas.microsoft.com/office/drawing/2014/main" id="{DEEEFCB4-D41D-AA62-338E-75C3D642E8E0}"/>
+              </a:ext>
+            </a:extLst>
+          </p:cNvPr>
+          <p:cNvSpPr>
+            <a:spLocks noGrp="1"/>
+          </p:cNvSpPr>
+          <p:nvPr>
+            <p:ph type="title"/>
+          </p:nvPr>
+        </p:nvSpPr>
+        <p:spPr/>
+        <p:txBody>
+          <a:bodyPr>
+            <a:normAutofit/>
+          </a:bodyPr>
+          <a:lstStyle/>
+          <a:p>
+            <a:r>
+              <a:rPr lang="ko-KR" altLang="en-US" sz="4000"/>
+              <a:t>게시글 등록 </a:t>
+            </a:r>
+            <a:r>
+              <a:rPr lang="en-US" altLang="ko-KR" sz="4000"/>
+              <a:t>API </a:t>
+            </a:r>
+            <a:r>
+              <a:rPr lang="ko-KR" altLang="en-US" sz="4000"/>
+              <a:t>요청 즉시 </a:t>
+            </a:r>
+            <a:r>
+              <a:rPr lang="en-US" altLang="ko-KR" sz="4000"/>
+              <a:t>DB </a:t>
+            </a:r>
+            <a:r>
+              <a:rPr lang="ko-KR" altLang="en-US" sz="4000"/>
+              <a:t>상태 확인</a:t>
+            </a:r>
+          </a:p>
+        </p:txBody>
+      </p:sp>
+      <p:pic>
+        <p:nvPicPr>
+          <p:cNvPr id="4" name="그림 3">
+            <a:extLst>
+              <a:ext uri="{FF2B5EF4-FFF2-40B4-BE49-F238E27FC236}">
+                <a16:creationId xmlns:a16="http://schemas.microsoft.com/office/drawing/2014/main" id="{DADE9139-CF69-37B0-856D-4F33445707EF}"/>
+              </a:ext>
+            </a:extLst>
+          </p:cNvPr>
+          <p:cNvPicPr>
+            <a:picLocks noChangeAspect="1"/>
+          </p:cNvPicPr>
+          <p:nvPr/>
+        </p:nvPicPr>
+        <p:blipFill>
+          <a:blip r:embed="rId2"/>
+          <a:stretch>
+            <a:fillRect/>
+          </a:stretch>
+        </p:blipFill>
+        <p:spPr>
+          <a:xfrm>
+            <a:off x="368207" y="1846546"/>
+            <a:ext cx="5877745" cy="2305372"/>
+          </a:xfrm>
+          <a:prstGeom prst="rect">
+            <a:avLst/>
+          </a:prstGeom>
+        </p:spPr>
+      </p:pic>
+      <p:grpSp>
+        <p:nvGrpSpPr>
+          <p:cNvPr id="11" name="그룹 10">
+            <a:extLst>
+              <a:ext uri="{FF2B5EF4-FFF2-40B4-BE49-F238E27FC236}">
+                <a16:creationId xmlns:a16="http://schemas.microsoft.com/office/drawing/2014/main" id="{22760240-A6AB-DF38-B06B-5D55B73332FA}"/>
+              </a:ext>
+            </a:extLst>
+          </p:cNvPr>
+          <p:cNvGrpSpPr/>
+          <p:nvPr/>
+        </p:nvGrpSpPr>
+        <p:grpSpPr>
+          <a:xfrm>
+            <a:off x="368207" y="5120641"/>
+            <a:ext cx="10345445" cy="1543265"/>
+            <a:chOff x="381068" y="4488843"/>
+            <a:chExt cx="10345445" cy="1543265"/>
+          </a:xfrm>
+        </p:grpSpPr>
+        <p:pic>
+          <p:nvPicPr>
+            <p:cNvPr id="6" name="그림 5">
+              <a:extLst>
+                <a:ext uri="{FF2B5EF4-FFF2-40B4-BE49-F238E27FC236}">
+                  <a16:creationId xmlns:a16="http://schemas.microsoft.com/office/drawing/2014/main" id="{C1CF691A-FFFF-5700-4C2B-698572019468}"/>
+                </a:ext>
+              </a:extLst>
+            </p:cNvPr>
+            <p:cNvPicPr>
+              <a:picLocks noChangeAspect="1"/>
+            </p:cNvPicPr>
+            <p:nvPr/>
+          </p:nvPicPr>
+          <p:blipFill>
+            <a:blip r:embed="rId3"/>
+            <a:stretch>
+              <a:fillRect/>
+            </a:stretch>
+          </p:blipFill>
+          <p:spPr>
+            <a:xfrm>
+              <a:off x="4124751" y="4488843"/>
+              <a:ext cx="2152950" cy="1428949"/>
+            </a:xfrm>
+            <a:prstGeom prst="rect">
+              <a:avLst/>
+            </a:prstGeom>
+          </p:spPr>
+        </p:pic>
+        <p:pic>
+          <p:nvPicPr>
+            <p:cNvPr id="8" name="그림 7">
+              <a:extLst>
+                <a:ext uri="{FF2B5EF4-FFF2-40B4-BE49-F238E27FC236}">
+                  <a16:creationId xmlns:a16="http://schemas.microsoft.com/office/drawing/2014/main" id="{D6AF0870-5BF8-D37D-58DF-5C4E24C5E747}"/>
+                </a:ext>
+              </a:extLst>
+            </p:cNvPr>
+            <p:cNvPicPr>
+              <a:picLocks noChangeAspect="1"/>
+            </p:cNvPicPr>
+            <p:nvPr/>
+          </p:nvPicPr>
+          <p:blipFill>
+            <a:blip r:embed="rId4"/>
+            <a:stretch>
+              <a:fillRect/>
+            </a:stretch>
+          </p:blipFill>
+          <p:spPr>
+            <a:xfrm>
+              <a:off x="381068" y="4488843"/>
+              <a:ext cx="3381847" cy="1409897"/>
+            </a:xfrm>
+            <a:prstGeom prst="rect">
+              <a:avLst/>
+            </a:prstGeom>
+          </p:spPr>
+        </p:pic>
+        <p:pic>
+          <p:nvPicPr>
+            <p:cNvPr id="10" name="그림 9">
+              <a:extLst>
+                <a:ext uri="{FF2B5EF4-FFF2-40B4-BE49-F238E27FC236}">
+                  <a16:creationId xmlns:a16="http://schemas.microsoft.com/office/drawing/2014/main" id="{E37F0F14-9D24-851E-2BC2-8F86C7323FDB}"/>
+                </a:ext>
+              </a:extLst>
+            </p:cNvPr>
+            <p:cNvPicPr>
+              <a:picLocks noChangeAspect="1"/>
+            </p:cNvPicPr>
+            <p:nvPr/>
+          </p:nvPicPr>
+          <p:blipFill>
+            <a:blip r:embed="rId5"/>
+            <a:stretch>
+              <a:fillRect/>
+            </a:stretch>
+          </p:blipFill>
+          <p:spPr>
+            <a:xfrm>
+              <a:off x="6706402" y="4488843"/>
+              <a:ext cx="4020111" cy="1543265"/>
+            </a:xfrm>
+            <a:prstGeom prst="rect">
+              <a:avLst/>
+            </a:prstGeom>
+          </p:spPr>
+        </p:pic>
+      </p:grpSp>
+      <p:sp>
+        <p:nvSpPr>
+          <p:cNvPr id="12" name="TextBox 11">
+            <a:extLst>
+              <a:ext uri="{FF2B5EF4-FFF2-40B4-BE49-F238E27FC236}">
+                <a16:creationId xmlns:a16="http://schemas.microsoft.com/office/drawing/2014/main" id="{1750D169-F38F-DCCA-8A8B-5EC40C22E17B}"/>
+              </a:ext>
+            </a:extLst>
+          </p:cNvPr>
+          <p:cNvSpPr txBox="1"/>
+          <p:nvPr/>
+        </p:nvSpPr>
+        <p:spPr>
+          <a:xfrm>
+            <a:off x="6611112" y="1846546"/>
+            <a:ext cx="5120640" cy="3170099"/>
+          </a:xfrm>
+          <a:prstGeom prst="rect">
+            <a:avLst/>
+          </a:prstGeom>
+          <a:noFill/>
+        </p:spPr>
+        <p:txBody>
+          <a:bodyPr wrap="square" rtlCol="0">
+            <a:spAutoFit/>
+          </a:bodyPr>
+          <a:lstStyle/>
+          <a:p>
+            <a:r>
+              <a:rPr lang="ko-KR" altLang="en-US" sz="1100"/>
+              <a:t>요청 즉시 확인하면 </a:t>
+            </a:r>
+            <a:endParaRPr lang="en-US" altLang="ko-KR" sz="1100"/>
+          </a:p>
+          <a:p>
+            <a:r>
+              <a:rPr lang="ko-KR" altLang="en-US" sz="1100"/>
+              <a:t>게시글 등록에 의해 변경되는 테이블 중</a:t>
+            </a:r>
+            <a:endParaRPr lang="en-US" altLang="ko-KR" sz="1100"/>
+          </a:p>
+          <a:p>
+            <a:r>
+              <a:rPr lang="en-US" altLang="ko-KR" sz="1100"/>
+              <a:t>user </a:t>
+            </a:r>
+            <a:r>
+              <a:rPr lang="ko-KR" altLang="en-US" sz="1100"/>
+              <a:t>테이블의 </a:t>
+            </a:r>
+            <a:r>
+              <a:rPr lang="en-US" altLang="ko-KR" sz="1100"/>
+              <a:t>activeScore </a:t>
+            </a:r>
+            <a:r>
+              <a:rPr lang="ko-KR" altLang="en-US" sz="1100"/>
+              <a:t>속성은 업데이트가 느린걸 확인할 수 있다</a:t>
+            </a:r>
+            <a:r>
+              <a:rPr lang="en-US" altLang="ko-KR" sz="1100"/>
+              <a:t>.</a:t>
+            </a:r>
+          </a:p>
+          <a:p>
+            <a:endParaRPr lang="en-US" altLang="ko-KR" sz="1100"/>
+          </a:p>
+          <a:p>
+            <a:r>
+              <a:rPr lang="ko-KR" altLang="en-US" sz="1100"/>
+              <a:t>이를 데이터의 일관성이 무너졌다라고 표현한다</a:t>
+            </a:r>
+            <a:r>
+              <a:rPr lang="en-US" altLang="ko-KR" sz="1100"/>
+              <a:t>.</a:t>
+            </a:r>
+          </a:p>
+          <a:p>
+            <a:endParaRPr lang="en-US" altLang="ko-KR" sz="1100"/>
+          </a:p>
+          <a:p>
+            <a:r>
+              <a:rPr lang="en-US" altLang="ko-KR" sz="1100"/>
+              <a:t>UserService</a:t>
+            </a:r>
+            <a:r>
+              <a:rPr lang="ko-KR" altLang="en-US" sz="1100"/>
+              <a:t>에서 </a:t>
+            </a:r>
+            <a:r>
+              <a:rPr lang="en-US" altLang="ko-KR" sz="1100"/>
+              <a:t>activeScore </a:t>
+            </a:r>
+            <a:r>
+              <a:rPr lang="ko-KR" altLang="en-US" sz="1100"/>
+              <a:t>적립 로직에 </a:t>
+            </a:r>
+            <a:r>
+              <a:rPr lang="en-US" altLang="ko-KR" sz="1100"/>
+              <a:t>10</a:t>
+            </a:r>
+            <a:r>
+              <a:rPr lang="ko-KR" altLang="en-US" sz="1100"/>
+              <a:t>초의 지연을 넣은 것을 고려하여</a:t>
+            </a:r>
+            <a:endParaRPr lang="en-US" altLang="ko-KR" sz="1100"/>
+          </a:p>
+          <a:p>
+            <a:r>
+              <a:rPr lang="en-US" altLang="ko-KR" sz="1100"/>
+              <a:t>10</a:t>
+            </a:r>
+            <a:r>
+              <a:rPr lang="ko-KR" altLang="en-US" sz="1100"/>
+              <a:t>초 이후 확인하면 </a:t>
+            </a:r>
+            <a:r>
+              <a:rPr lang="en-US" altLang="ko-KR" sz="1100"/>
+              <a:t>users </a:t>
+            </a:r>
+            <a:r>
+              <a:rPr lang="ko-KR" altLang="en-US" sz="1100"/>
+              <a:t>테이블의 </a:t>
+            </a:r>
+            <a:r>
+              <a:rPr lang="en-US" altLang="ko-KR" sz="1100"/>
+              <a:t>active_score</a:t>
+            </a:r>
+            <a:r>
+              <a:rPr lang="ko-KR" altLang="en-US" sz="1100"/>
+              <a:t>가 </a:t>
+            </a:r>
+            <a:r>
+              <a:rPr lang="en-US" altLang="ko-KR" sz="1100"/>
+              <a:t>10</a:t>
+            </a:r>
+            <a:r>
+              <a:rPr lang="ko-KR" altLang="en-US" sz="1100"/>
+              <a:t>으로 변경된 것을 확인할 수 있다</a:t>
+            </a:r>
+            <a:r>
+              <a:rPr lang="en-US" altLang="ko-KR" sz="1100"/>
+              <a:t>.</a:t>
+            </a:r>
+          </a:p>
+          <a:p>
+            <a:endParaRPr lang="en-US" altLang="ko-KR" sz="1100"/>
+          </a:p>
+          <a:p>
+            <a:r>
+              <a:rPr lang="ko-KR" altLang="en-US" sz="1000">
+                <a:latin typeface="+mj-ea"/>
+                <a:ea typeface="+mj-ea"/>
+              </a:rPr>
+              <a:t>이를 최종적 일관성 </a:t>
+            </a:r>
+            <a:r>
+              <a:rPr lang="en-US" altLang="ko-KR" sz="1000">
+                <a:latin typeface="+mj-ea"/>
+                <a:ea typeface="+mj-ea"/>
+              </a:rPr>
+              <a:t>(Eventual Consistency) </a:t>
+            </a:r>
+            <a:r>
+              <a:rPr lang="ko-KR" altLang="en-US" sz="1000">
+                <a:latin typeface="+mj-ea"/>
+                <a:ea typeface="+mj-ea"/>
+              </a:rPr>
+              <a:t>라고 한다</a:t>
+            </a:r>
+            <a:r>
+              <a:rPr lang="en-US" altLang="ko-KR" sz="1000">
+                <a:latin typeface="+mj-ea"/>
+                <a:ea typeface="+mj-ea"/>
+              </a:rPr>
+              <a:t>. MSA </a:t>
+            </a:r>
+            <a:r>
+              <a:rPr lang="ko-KR" altLang="en-US" sz="1000">
+                <a:latin typeface="+mj-ea"/>
+                <a:ea typeface="+mj-ea"/>
+              </a:rPr>
+              <a:t>환경에서 </a:t>
+            </a:r>
+            <a:r>
+              <a:rPr lang="en-US" altLang="ko-KR" sz="1000">
+                <a:latin typeface="+mj-ea"/>
+                <a:ea typeface="+mj-ea"/>
+              </a:rPr>
+              <a:t>Saga</a:t>
+            </a:r>
+            <a:r>
+              <a:rPr lang="ko-KR" altLang="en-US" sz="1000">
+                <a:latin typeface="+mj-ea"/>
+                <a:ea typeface="+mj-ea"/>
+              </a:rPr>
+              <a:t>패턴을 사용하다보면 어쩔수 없이 마주하게 되는 찰나의 시간에 일관성이 일그러지는 시간이 있으나 많은 </a:t>
+            </a:r>
+            <a:r>
+              <a:rPr lang="en-US" altLang="ko-KR" sz="1000">
+                <a:latin typeface="+mj-ea"/>
+                <a:ea typeface="+mj-ea"/>
+              </a:rPr>
+              <a:t>MSA </a:t>
+            </a:r>
+            <a:r>
+              <a:rPr lang="ko-KR" altLang="en-US" sz="1000">
+                <a:latin typeface="+mj-ea"/>
+                <a:ea typeface="+mj-ea"/>
+              </a:rPr>
+              <a:t>서비스에선 최종적 일관성을 허용한다</a:t>
+            </a:r>
+            <a:r>
+              <a:rPr lang="en-US" altLang="ko-KR" sz="1000">
+                <a:latin typeface="+mj-ea"/>
+                <a:ea typeface="+mj-ea"/>
+              </a:rPr>
+              <a:t>. </a:t>
+            </a:r>
+            <a:r>
+              <a:rPr lang="en-US" altLang="ko-KR" sz="1000">
+                <a:latin typeface="+mj-ea"/>
+                <a:ea typeface="+mj-ea"/>
+                <a:sym typeface="Wingdings" panose="05000000000000000000" pitchFamily="2" charset="2"/>
+              </a:rPr>
+              <a:t> </a:t>
+            </a:r>
+            <a:r>
+              <a:rPr lang="ko-KR" altLang="en-US" sz="1000">
+                <a:latin typeface="+mj-ea"/>
+                <a:ea typeface="+mj-ea"/>
+                <a:sym typeface="Wingdings" panose="05000000000000000000" pitchFamily="2" charset="2"/>
+              </a:rPr>
+              <a:t>입력하자 마자 바로 적용되는 서비스가 적고 최종적으로는 올바른 데이터로 가기 때문이기도 하며</a:t>
+            </a:r>
+            <a:r>
+              <a:rPr lang="en-US" altLang="ko-KR" sz="1000">
+                <a:latin typeface="+mj-ea"/>
+                <a:ea typeface="+mj-ea"/>
+                <a:sym typeface="Wingdings" panose="05000000000000000000" pitchFamily="2" charset="2"/>
+              </a:rPr>
+              <a:t>,</a:t>
+            </a:r>
+            <a:r>
+              <a:rPr lang="ko-KR" altLang="en-US" sz="1000">
+                <a:latin typeface="+mj-ea"/>
+                <a:ea typeface="+mj-ea"/>
+                <a:sym typeface="Wingdings" panose="05000000000000000000" pitchFamily="2" charset="2"/>
+              </a:rPr>
+              <a:t> 찰나의 시간동안 데이터가 일관되지 않는 상황을 사용자가 목격하기도 쉽지 않기 때문이다</a:t>
+            </a:r>
+            <a:r>
+              <a:rPr lang="en-US" altLang="ko-KR" sz="1000">
+                <a:latin typeface="+mj-ea"/>
+                <a:ea typeface="+mj-ea"/>
+                <a:sym typeface="Wingdings" panose="05000000000000000000" pitchFamily="2" charset="2"/>
+              </a:rPr>
+              <a:t>.</a:t>
+            </a:r>
+          </a:p>
+          <a:p>
+            <a:endParaRPr lang="en-US" altLang="ko-KR" sz="1000">
+              <a:latin typeface="+mj-ea"/>
+              <a:ea typeface="+mj-ea"/>
+              <a:sym typeface="Wingdings" panose="05000000000000000000" pitchFamily="2" charset="2"/>
+            </a:endParaRPr>
+          </a:p>
+          <a:p>
+            <a:r>
+              <a:rPr lang="ko-KR" altLang="en-US" sz="1000" b="1">
+                <a:latin typeface="+mj-ea"/>
+                <a:ea typeface="+mj-ea"/>
+                <a:sym typeface="Wingdings" panose="05000000000000000000" pitchFamily="2" charset="2"/>
+              </a:rPr>
+              <a:t>최종적 일관성이 허용되는 예시 </a:t>
+            </a:r>
+            <a:r>
+              <a:rPr lang="en-US" altLang="ko-KR" sz="1000" b="1">
+                <a:latin typeface="+mj-ea"/>
+                <a:ea typeface="+mj-ea"/>
+                <a:sym typeface="Wingdings" panose="05000000000000000000" pitchFamily="2" charset="2"/>
+              </a:rPr>
+              <a:t>: </a:t>
+            </a:r>
+            <a:r>
+              <a:rPr lang="ko-KR" altLang="en-US" sz="1000">
+                <a:latin typeface="+mj-ea"/>
+                <a:ea typeface="+mj-ea"/>
+                <a:sym typeface="Wingdings" panose="05000000000000000000" pitchFamily="2" charset="2"/>
+              </a:rPr>
+              <a:t>결제관련 최종적일관성에 의해 재고가 있는것 처럼 보여도 실제 결제 및 재고 차감 로직 수행에는 재고를 확인하는 로직이 들어감으로 재고가 다 떨어져서 결제에 실패했다는 안내를 하면 된다</a:t>
+            </a:r>
+            <a:r>
+              <a:rPr lang="en-US" altLang="ko-KR" sz="1000">
+                <a:latin typeface="+mj-ea"/>
+                <a:ea typeface="+mj-ea"/>
+                <a:sym typeface="Wingdings" panose="05000000000000000000" pitchFamily="2" charset="2"/>
+              </a:rPr>
+              <a:t>.</a:t>
+            </a:r>
+            <a:endParaRPr lang="ko-KR" altLang="en-US" sz="1000">
+              <a:latin typeface="+mj-ea"/>
+              <a:ea typeface="+mj-ea"/>
+            </a:endParaRPr>
+          </a:p>
+        </p:txBody>
+      </p:sp>
+    </p:spTree>
+    <p:extLst>
+      <p:ext uri="{BB962C8B-B14F-4D97-AF65-F5344CB8AC3E}">
+        <p14:creationId xmlns:p14="http://schemas.microsoft.com/office/powerpoint/2010/main" val="2279201203"/>
+      </p:ext>
+    </p:extLst>
+  </p:cSld>
+  <p:clrMapOvr>
+    <a:masterClrMapping/>
+  </p:clrMapOvr>
+</p:sld>
+</file>
+
+<file path=ppt/slides/slide15.xml><?xml version="1.0" encoding="utf-8"?>
+<p:sld xmlns:a="http://schemas.openxmlformats.org/drawingml/2006/main" xmlns:r="http://schemas.openxmlformats.org/officeDocument/2006/relationships" xmlns:p="http://schemas.openxmlformats.org/presentationml/2006/main">
+  <p:cSld>
+    <p:spTree>
+      <p:nvGrpSpPr>
+        <p:cNvPr id="1" name=""/>
+        <p:cNvGrpSpPr/>
+        <p:nvPr/>
+      </p:nvGrpSpPr>
+      <p:grpSpPr>
+        <a:xfrm>
+          <a:off x="0" y="0"/>
+          <a:ext cx="0" cy="0"/>
+          <a:chOff x="0" y="0"/>
+          <a:chExt cx="0" cy="0"/>
+        </a:xfrm>
+      </p:grpSpPr>
+      <p:sp>
+        <p:nvSpPr>
+          <p:cNvPr id="2" name="제목 1">
+            <a:extLst>
+              <a:ext uri="{FF2B5EF4-FFF2-40B4-BE49-F238E27FC236}">
+                <a16:creationId xmlns:a16="http://schemas.microsoft.com/office/drawing/2014/main" id="{DF2BE8A8-93B1-2488-D87B-76B8E8BF8856}"/>
+              </a:ext>
+            </a:extLst>
+          </p:cNvPr>
+          <p:cNvSpPr>
+            <a:spLocks noGrp="1"/>
+          </p:cNvSpPr>
+          <p:nvPr>
+            <p:ph type="title"/>
+          </p:nvPr>
+        </p:nvSpPr>
+        <p:spPr/>
+        <p:txBody>
+          <a:bodyPr>
+            <a:normAutofit/>
+          </a:bodyPr>
+          <a:lstStyle/>
+          <a:p>
+            <a:r>
+              <a:rPr lang="en-US" altLang="ko-KR" sz="3600"/>
+              <a:t>Saga</a:t>
+            </a:r>
+            <a:r>
+              <a:rPr lang="ko-KR" altLang="en-US" sz="3600"/>
+              <a:t>패턴을 구현해야할 때 고려해야하는 요소</a:t>
+            </a:r>
+          </a:p>
+        </p:txBody>
+      </p:sp>
+      <p:sp>
+        <p:nvSpPr>
+          <p:cNvPr id="5" name="TextBox 4">
+            <a:extLst>
+              <a:ext uri="{FF2B5EF4-FFF2-40B4-BE49-F238E27FC236}">
+                <a16:creationId xmlns:a16="http://schemas.microsoft.com/office/drawing/2014/main" id="{CD3F36AD-7967-D78A-3384-1E9786038412}"/>
+              </a:ext>
+            </a:extLst>
+          </p:cNvPr>
+          <p:cNvSpPr txBox="1"/>
+          <p:nvPr/>
+        </p:nvSpPr>
+        <p:spPr>
+          <a:xfrm>
+            <a:off x="240030" y="1808726"/>
+            <a:ext cx="10367010" cy="307777"/>
+          </a:xfrm>
+          <a:prstGeom prst="rect">
+            <a:avLst/>
+          </a:prstGeom>
+          <a:noFill/>
+        </p:spPr>
+        <p:txBody>
+          <a:bodyPr wrap="square">
+            <a:spAutoFit/>
+          </a:bodyPr>
+          <a:lstStyle/>
+          <a:p>
+            <a:r>
+              <a:rPr lang="ko-KR" altLang="en-US" sz="1400"/>
+              <a:t>최종적 일관성을 허용하지 말아야하는 경우의 처리</a:t>
+            </a:r>
+            <a:r>
+              <a:rPr lang="en-US" altLang="ko-KR" sz="1400"/>
+              <a:t>: https://youtu.be/0UiE9YJi_f4</a:t>
+            </a:r>
+          </a:p>
+        </p:txBody>
+      </p:sp>
+      <p:pic>
+        <p:nvPicPr>
+          <p:cNvPr id="7" name="그림 6">
+            <a:extLst>
+              <a:ext uri="{FF2B5EF4-FFF2-40B4-BE49-F238E27FC236}">
+                <a16:creationId xmlns:a16="http://schemas.microsoft.com/office/drawing/2014/main" id="{4C9BC2D9-792B-7645-56A5-CB60ED30623E}"/>
+              </a:ext>
+            </a:extLst>
+          </p:cNvPr>
+          <p:cNvPicPr>
+            <a:picLocks noChangeAspect="1"/>
+          </p:cNvPicPr>
+          <p:nvPr/>
+        </p:nvPicPr>
+        <p:blipFill>
+          <a:blip r:embed="rId2"/>
+          <a:stretch>
+            <a:fillRect/>
+          </a:stretch>
+        </p:blipFill>
+        <p:spPr>
+          <a:xfrm>
+            <a:off x="312530" y="2236904"/>
+            <a:ext cx="6981463" cy="4438215"/>
+          </a:xfrm>
+          <a:prstGeom prst="rect">
+            <a:avLst/>
+          </a:prstGeom>
+          <a:ln>
+            <a:solidFill>
+              <a:schemeClr val="tx1"/>
+            </a:solidFill>
+          </a:ln>
+        </p:spPr>
+      </p:pic>
+    </p:spTree>
+    <p:extLst>
+      <p:ext uri="{BB962C8B-B14F-4D97-AF65-F5344CB8AC3E}">
+        <p14:creationId xmlns:p14="http://schemas.microsoft.com/office/powerpoint/2010/main" val="3648338161"/>
+      </p:ext>
+    </p:extLst>
+  </p:cSld>
+  <p:clrMapOvr>
+    <a:masterClrMapping/>
+  </p:clrMapOvr>
+</p:sld>
+</file>
+
 <file path=ppt/slides/slide2.xml><?xml version="1.0" encoding="utf-8"?>
 <p:sld xmlns:a="http://schemas.openxmlformats.org/drawingml/2006/main" xmlns:r="http://schemas.openxmlformats.org/officeDocument/2006/relationships" xmlns:p="http://schemas.openxmlformats.org/presentationml/2006/main">
   <p:cSld>
